--- a/assets/powerpoints/module-n1-inscription/C1-les-petits-mots-coupes.pptx
+++ b/assets/powerpoints/module-n1-inscription/C1-les-petits-mots-coupes.pptx
@@ -14238,7 +14238,43 @@
                 </a:solidFill>
                 <a:latin typeface="Verdana"/>
               </a:rPr>
-              <a:t>Première ligne : &lt;b&gt;3120, avenue Papineau, app. 4&lt;/b&gt;. Deuxième ligne : &lt;b&gt;Montréal, QC  H2K 1N4&lt;/b&gt;. Dans plusieurs pays, le numéro vient après le nom de la rue — ici, il vient toujours avant, et il est suivi d'une virgule.</a:t>
+              <a:t>Première ligne : </a:t>
+            </a:r>
+            <a:r>
+              <a:rPr sz="2000" b="1" i="0">
+                <a:solidFill>
+                  <a:srgbClr val="4B4F52"/>
+                </a:solidFill>
+                <a:latin typeface="Verdana"/>
+              </a:rPr>
+              <a:t>3120, avenue Papineau, app. 4</a:t>
+            </a:r>
+            <a:r>
+              <a:rPr sz="2000" b="0" i="0">
+                <a:solidFill>
+                  <a:srgbClr val="4B4F52"/>
+                </a:solidFill>
+                <a:latin typeface="Verdana"/>
+              </a:rPr>
+              <a:t>. Deuxième ligne : </a:t>
+            </a:r>
+            <a:r>
+              <a:rPr sz="2000" b="1" i="0">
+                <a:solidFill>
+                  <a:srgbClr val="4B4F52"/>
+                </a:solidFill>
+                <a:latin typeface="Verdana"/>
+              </a:rPr>
+              <a:t>Montréal, QC  H2K 1N4</a:t>
+            </a:r>
+            <a:r>
+              <a:rPr sz="2000" b="0" i="0">
+                <a:solidFill>
+                  <a:srgbClr val="4B4F52"/>
+                </a:solidFill>
+                <a:latin typeface="Verdana"/>
+              </a:rPr>
+              <a:t>. Dans plusieurs pays, le numéro vient après le nom de la rue — ici, il vient toujours avant, et il est suivi d'une virgule.</a:t>
             </a:r>
           </a:p>
         </p:txBody>
